--- a/presentation/Financial_QA_Presentation.pptx
+++ b/presentation/Financial_QA_Presentation.pptx
@@ -4378,7 +4378,7 @@
                 </a:solidFill>
                 <a:latin typeface="Calibri"/>
               </a:rPr>
-              <a:t>Final Report (PDF, 19 pages, LaTeX)   •   Working Web App   •   Source Code   •   This Video</a:t>
+              <a:t>Final Report (body under 20-page limit)   •   Working Web App   •   Source Code   •   This Video</a:t>
             </a:r>
           </a:p>
         </p:txBody>
@@ -11144,7 +11144,7 @@
                             <a:srgbClr val="1F1F1F"/>
                           </a:solidFill>
                         </a:rPr>
-                        <a:t>0.333</a:t>
+                        <a:t>0.620</a:t>
                       </a:r>
                     </a:p>
                   </a:txBody>
@@ -11166,7 +11166,7 @@
                             <a:srgbClr val="1F1F1F"/>
                           </a:solidFill>
                         </a:rPr>
-                        <a:t>0.800</a:t>
+                        <a:t>0.963</a:t>
                       </a:r>
                     </a:p>
                   </a:txBody>
@@ -11188,7 +11188,7 @@
                             <a:srgbClr val="1F1F1F"/>
                           </a:solidFill>
                         </a:rPr>
-                        <a:t>4.9 ms</a:t>
+                        <a:t>10.09 ms</a:t>
                       </a:r>
                     </a:p>
                   </a:txBody>
@@ -11234,7 +11234,7 @@
                             <a:srgbClr val="1F1F1F"/>
                           </a:solidFill>
                         </a:rPr>
-                        <a:t>0.200</a:t>
+                        <a:t>0.447</a:t>
                       </a:r>
                     </a:p>
                   </a:txBody>
@@ -11256,7 +11256,7 @@
                             <a:srgbClr val="1F1F1F"/>
                           </a:solidFill>
                         </a:rPr>
-                        <a:t>0.517</a:t>
+                        <a:t>0.717</a:t>
                       </a:r>
                     </a:p>
                   </a:txBody>
@@ -11278,7 +11278,7 @@
                             <a:srgbClr val="1F1F1F"/>
                           </a:solidFill>
                         </a:rPr>
-                        <a:t>2.0 ms</a:t>
+                        <a:t>5.57 ms</a:t>
                       </a:r>
                     </a:p>
                   </a:txBody>
@@ -11324,7 +11324,7 @@
                             <a:srgbClr val="2E7D32"/>
                           </a:solidFill>
                         </a:rPr>
-                        <a:t>0.400</a:t>
+                        <a:t>0.580</a:t>
                       </a:r>
                     </a:p>
                   </a:txBody>
@@ -11368,7 +11368,7 @@
                             <a:srgbClr val="2E7D32"/>
                           </a:solidFill>
                         </a:rPr>
-                        <a:t>89.0 ms</a:t>
+                        <a:t>177.19 ms</a:t>
                       </a:r>
                     </a:p>
                   </a:txBody>
@@ -11881,7 +11881,7 @@
                 </a:solidFill>
                 <a:latin typeface="Calibri"/>
               </a:rPr>
-              <a:t>Same 5 financial questions, three answer strategies. Which approach hallucinates?</a:t>
+              <a:t>50 financial-qa-10K questions, three answer strategies. Which approach stays grounded?</a:t>
             </a:r>
           </a:p>
         </p:txBody>
@@ -12110,7 +12110,7 @@
                 </a:solidFill>
                 <a:latin typeface="Calibri"/>
               </a:rPr>
-              <a:t>0.400</a:t>
+              <a:t>0.008</a:t>
             </a:r>
           </a:p>
         </p:txBody>
@@ -12180,7 +12180,7 @@
                 </a:solidFill>
                 <a:latin typeface="Calibri"/>
               </a:rPr>
-              <a:t>0.600</a:t>
+              <a:t>1.000</a:t>
             </a:r>
           </a:p>
         </p:txBody>
@@ -12250,7 +12250,7 @@
                 </a:solidFill>
                 <a:latin typeface="Calibri"/>
               </a:rPr>
-              <a:t>1 / 5</a:t>
+              <a:t>0 / 50</a:t>
             </a:r>
           </a:p>
         </p:txBody>
@@ -12479,7 +12479,7 @@
                 </a:solidFill>
                 <a:latin typeface="Calibri"/>
               </a:rPr>
-              <a:t>0.200</a:t>
+              <a:t>0.133</a:t>
             </a:r>
           </a:p>
         </p:txBody>
@@ -12619,7 +12619,7 @@
                 </a:solidFill>
                 <a:latin typeface="Calibri"/>
               </a:rPr>
-              <a:t>0 / 5</a:t>
+              <a:t>0 / 50</a:t>
             </a:r>
           </a:p>
         </p:txBody>
@@ -12848,7 +12848,7 @@
                 </a:solidFill>
                 <a:latin typeface="Calibri"/>
               </a:rPr>
-              <a:t>1.000</a:t>
+              <a:t>0.840</a:t>
             </a:r>
           </a:p>
         </p:txBody>
@@ -12988,7 +12988,7 @@
                 </a:solidFill>
                 <a:latin typeface="Calibri"/>
               </a:rPr>
-              <a:t>0 / 5</a:t>
+              <a:t>0 / 50</a:t>
             </a:r>
           </a:p>
         </p:txBody>

--- a/presentation/Financial_QA_Presentation.pptx
+++ b/presentation/Financial_QA_Presentation.pptx
@@ -3390,7 +3390,7 @@
                 </a:solidFill>
                 <a:latin typeface="Calibri"/>
               </a:rPr>
-              <a:t>Final Group Project Report  •  May 2026</a:t>
+              <a:t>Final Group Project Report  •  June 2026</a:t>
             </a:r>
           </a:p>
         </p:txBody>
@@ -3672,7 +3672,7 @@
                 </a:solidFill>
                 <a:latin typeface="Calibri"/>
               </a:rPr>
-              <a:t>Demonstrated Word2Vec, TF-IDF, and Sentence-Transformer baselines</a:t>
+              <a:t>Evaluated on 50 real SEC 10-K Q&amp;A pairs (financial-qa-10K)</a:t>
             </a:r>
           </a:p>
           <a:p>
@@ -3700,7 +3700,7 @@
                 </a:solidFill>
                 <a:latin typeface="Calibri"/>
               </a:rPr>
-              <a:t>Perfect retrieval (MRR = 1.000) on the test corpus</a:t>
+              <a:t>Perfect retrieval: Hit@1 = MRR = 1.000 for MiniLM</a:t>
             </a:r>
           </a:p>
           <a:p>
@@ -3728,7 +3728,7 @@
                 </a:solidFill>
                 <a:latin typeface="Calibri"/>
               </a:rPr>
-              <a:t>Zero hallucinations with the RAG architecture</a:t>
+              <a:t>RAG recovers 84% of gold keywords vs &lt;1% without grounding</a:t>
             </a:r>
           </a:p>
           <a:p>
@@ -3756,7 +3756,7 @@
                 </a:solidFill>
                 <a:latin typeface="Calibri"/>
               </a:rPr>
-              <a:t>Deployed as Streamlit web app + FastAPI REST service</a:t>
+              <a:t>Deployed live on Streamlit Cloud (free, Groq-powered)</a:t>
             </a:r>
           </a:p>
         </p:txBody>
@@ -4448,7 +4448,7 @@
                 </a:solidFill>
                 <a:latin typeface="Calibri"/>
               </a:rPr>
-              <a:t>May 2026</a:t>
+              <a:t>June 2026</a:t>
             </a:r>
           </a:p>
         </p:txBody>
@@ -6595,7 +6595,7 @@
                 </a:solidFill>
                 <a:latin typeface="Calibri"/>
               </a:rPr>
-              <a:t>Transformer architecture (GPT-4o-mini)</a:t>
+              <a:t>Groq Llama 3.3 70B (free) / GPT-4o-mini</a:t>
             </a:r>
           </a:p>
           <a:p>
@@ -6623,7 +6623,7 @@
                 </a:solidFill>
                 <a:latin typeface="Calibri"/>
               </a:rPr>
-              <a:t>OpenAI Chat Completions API</a:t>
+              <a:t>OpenAI-compatible Chat API</a:t>
             </a:r>
           </a:p>
           <a:p>
@@ -9106,7 +9106,7 @@
                 </a:solidFill>
                 <a:latin typeface="Calibri"/>
               </a:rPr>
-              <a:t>GPT-4o-mini  •  LangChain</a:t>
+              <a:t>Groq Llama 3.3 / GPT-4o-mini</a:t>
             </a:r>
           </a:p>
         </p:txBody>
@@ -9338,7 +9338,7 @@
                 </a:solidFill>
                 <a:latin typeface="Calibri"/>
               </a:rPr>
-              <a:t>MiniLM-L6-v2  •  OpenAI emb.</a:t>
+              <a:t>MiniLM-L6-v2 (local, free)</a:t>
             </a:r>
           </a:p>
         </p:txBody>
@@ -10990,7 +10990,7 @@
                 </a:solidFill>
                 <a:latin typeface="Calibri"/>
               </a:rPr>
-              <a:t>Compared three methods on 5 financial queries — which retrieves the right passage?</a:t>
+              <a:t>50 real SEC 10-K Q&amp;A pairs — does the method retrieve the exact source passage?</a:t>
             </a:r>
           </a:p>
         </p:txBody>
@@ -11054,7 +11054,7 @@
                             <a:srgbClr val="FFFFFF"/>
                           </a:solidFill>
                         </a:rPr>
-                        <a:t>P₃</a:t>
+                        <a:t>Hit@1</a:t>
                       </a:r>
                     </a:p>
                   </a:txBody>
@@ -11144,7 +11144,7 @@
                             <a:srgbClr val="1F1F1F"/>
                           </a:solidFill>
                         </a:rPr>
-                        <a:t>0.620</a:t>
+                        <a:t>0.940</a:t>
                       </a:r>
                     </a:p>
                   </a:txBody>
@@ -11188,7 +11188,7 @@
                             <a:srgbClr val="1F1F1F"/>
                           </a:solidFill>
                         </a:rPr>
-                        <a:t>10.09 ms</a:t>
+                        <a:t>10.2 ms</a:t>
                       </a:r>
                     </a:p>
                   </a:txBody>
@@ -11234,7 +11234,7 @@
                             <a:srgbClr val="1F1F1F"/>
                           </a:solidFill>
                         </a:rPr>
-                        <a:t>0.447</a:t>
+                        <a:t>0.640</a:t>
                       </a:r>
                     </a:p>
                   </a:txBody>
@@ -11278,7 +11278,7 @@
                             <a:srgbClr val="1F1F1F"/>
                           </a:solidFill>
                         </a:rPr>
-                        <a:t>5.57 ms</a:t>
+                        <a:t>4.3 ms</a:t>
                       </a:r>
                     </a:p>
                   </a:txBody>
@@ -11324,7 +11324,7 @@
                             <a:srgbClr val="2E7D32"/>
                           </a:solidFill>
                         </a:rPr>
-                        <a:t>0.580</a:t>
+                        <a:t>1.000</a:t>
                       </a:r>
                     </a:p>
                   </a:txBody>
@@ -11368,7 +11368,7 @@
                             <a:srgbClr val="2E7D32"/>
                           </a:solidFill>
                         </a:rPr>
-                        <a:t>177.19 ms</a:t>
+                        <a:t>139 ms</a:t>
                       </a:r>
                     </a:p>
                   </a:txBody>
@@ -11523,13 +11523,13 @@
           <a:p>
             <a:pPr algn="ctr"/>
             <a:r>
-              <a:rPr sz="1600" b="1" i="0">
+              <a:rPr sz="1500" b="1" i="0">
                 <a:solidFill>
                   <a:srgbClr val="1F1F1F"/>
                 </a:solidFill>
                 <a:latin typeface="Calibri"/>
               </a:rPr>
-              <a:t>MRR for MiniLM-L6-v2</a:t>
+              <a:t>Hit@1 = MRR = 1.000 (MiniLM-L6-v2)</a:t>
             </a:r>
           </a:p>
         </p:txBody>
@@ -11564,8 +11564,8 @@
                 </a:solidFill>
                 <a:latin typeface="Calibri"/>
               </a:rPr>
-              <a:t>The correct document is always
-ranked first — perfect retrieval.</a:t>
+              <a:t>The exact source passage is
+retrieved first for every query.</a:t>
             </a:r>
           </a:p>
         </p:txBody>
@@ -11600,8 +11600,8 @@
                 </a:solidFill>
                 <a:latin typeface="Calibri"/>
               </a:rPr>
-              <a:t>2.7× better MRR than
-the Word2Vec baseline.</a:t>
+              <a:t>vs Hit@1 = 0.640 for Word2Vec
+(TF-IDF a strong 0.940 baseline).</a:t>
             </a:r>
           </a:p>
         </p:txBody>
@@ -12145,7 +12145,7 @@
                 </a:solidFill>
                 <a:latin typeface="Calibri"/>
               </a:rPr>
-              <a:t>Faithfulness</a:t>
+              <a:t>of gold keywords</a:t>
             </a:r>
           </a:p>
         </p:txBody>
@@ -12180,84 +12180,14 @@
                 </a:solidFill>
                 <a:latin typeface="Calibri"/>
               </a:rPr>
-              <a:t>1.000</a:t>
-            </a:r>
-          </a:p>
-        </p:txBody>
-      </p:sp>
-      <p:sp>
-        <p:nvSpPr>
-          <p:cNvPr id="14" name="TextBox 13"/>
-          <p:cNvSpPr txBox="1"/>
-          <p:nvPr/>
-        </p:nvSpPr>
-        <p:spPr>
-          <a:xfrm>
-            <a:off x="731520" y="4343400"/>
-            <a:ext cx="3200399" cy="274320"/>
-          </a:xfrm>
-          <a:prstGeom prst="rect">
-            <a:avLst/>
-          </a:prstGeom>
-          <a:noFill/>
-        </p:spPr>
-        <p:txBody>
-          <a:bodyPr wrap="square" tIns="50800" bIns="50800">
-            <a:spAutoFit/>
-          </a:bodyPr>
-          <a:lstStyle/>
-          <a:p>
-            <a:pPr algn="l"/>
-            <a:r>
-              <a:rPr sz="1200" b="0" i="0">
-                <a:solidFill>
-                  <a:srgbClr val="1F1F1F"/>
-                </a:solidFill>
-                <a:latin typeface="Calibri"/>
-              </a:rPr>
-              <a:t>Hallucinations</a:t>
-            </a:r>
-          </a:p>
-        </p:txBody>
-      </p:sp>
-      <p:sp>
-        <p:nvSpPr>
-          <p:cNvPr id="15" name="TextBox 14"/>
-          <p:cNvSpPr txBox="1"/>
-          <p:nvPr/>
-        </p:nvSpPr>
-        <p:spPr>
-          <a:xfrm>
-            <a:off x="731520" y="4389120"/>
-            <a:ext cx="3200399" cy="365760"/>
-          </a:xfrm>
-          <a:prstGeom prst="rect">
-            <a:avLst/>
-          </a:prstGeom>
-          <a:noFill/>
-        </p:spPr>
-        <p:txBody>
-          <a:bodyPr wrap="square" tIns="50800" bIns="50800">
-            <a:spAutoFit/>
-          </a:bodyPr>
-          <a:lstStyle/>
-          <a:p>
-            <a:pPr algn="r"/>
-            <a:r>
-              <a:rPr sz="2000" b="1" i="0">
-                <a:solidFill>
-                  <a:srgbClr val="C62828"/>
-                </a:solidFill>
-                <a:latin typeface="Calibri"/>
-              </a:rPr>
-              <a:t>0 / 50</a:t>
-            </a:r>
-          </a:p>
-        </p:txBody>
-      </p:sp>
-      <p:sp>
-        <p:nvSpPr>
-          <p:cNvPr id="16" name="Rounded Rectangle 15"/>
+              <a:t>&lt;1%</a:t>
+            </a:r>
+          </a:p>
+        </p:txBody>
+      </p:sp>
+      <p:sp>
+        <p:nvSpPr>
+          <p:cNvPr id="14" name="Rounded Rectangle 13"/>
           <p:cNvSpPr/>
           <p:nvPr/>
         </p:nvSpPr>
@@ -12303,7 +12233,7 @@
       </p:sp>
       <p:sp>
         <p:nvSpPr>
-          <p:cNvPr id="17" name="TextBox 16"/>
+          <p:cNvPr id="15" name="TextBox 14"/>
           <p:cNvSpPr txBox="1"/>
           <p:nvPr/>
         </p:nvSpPr>
@@ -12338,7 +12268,7 @@
       </p:sp>
       <p:sp>
         <p:nvSpPr>
-          <p:cNvPr id="18" name="TextBox 17"/>
+          <p:cNvPr id="16" name="TextBox 15"/>
           <p:cNvSpPr txBox="1"/>
           <p:nvPr/>
         </p:nvSpPr>
@@ -12373,7 +12303,7 @@
       </p:sp>
       <p:sp>
         <p:nvSpPr>
-          <p:cNvPr id="19" name="Rectangle 18"/>
+          <p:cNvPr id="17" name="Rectangle 16"/>
           <p:cNvSpPr/>
           <p:nvPr/>
         </p:nvSpPr>
@@ -12416,7 +12346,7 @@
       </p:sp>
       <p:sp>
         <p:nvSpPr>
-          <p:cNvPr id="20" name="TextBox 19"/>
+          <p:cNvPr id="18" name="TextBox 17"/>
           <p:cNvSpPr txBox="1"/>
           <p:nvPr/>
         </p:nvSpPr>
@@ -12451,7 +12381,7 @@
       </p:sp>
       <p:sp>
         <p:nvSpPr>
-          <p:cNvPr id="21" name="TextBox 20"/>
+          <p:cNvPr id="19" name="TextBox 18"/>
           <p:cNvSpPr txBox="1"/>
           <p:nvPr/>
         </p:nvSpPr>
@@ -12486,7 +12416,7 @@
       </p:sp>
       <p:sp>
         <p:nvSpPr>
-          <p:cNvPr id="22" name="TextBox 21"/>
+          <p:cNvPr id="20" name="TextBox 19"/>
           <p:cNvSpPr txBox="1"/>
           <p:nvPr/>
         </p:nvSpPr>
@@ -12514,14 +12444,14 @@
                 </a:solidFill>
                 <a:latin typeface="Calibri"/>
               </a:rPr>
-              <a:t>Faithfulness</a:t>
-            </a:r>
-          </a:p>
-        </p:txBody>
-      </p:sp>
-      <p:sp>
-        <p:nvSpPr>
-          <p:cNvPr id="23" name="TextBox 22"/>
+              <a:t>of gold keywords</a:t>
+            </a:r>
+          </a:p>
+        </p:txBody>
+      </p:sp>
+      <p:sp>
+        <p:nvSpPr>
+          <p:cNvPr id="21" name="TextBox 20"/>
           <p:cNvSpPr txBox="1"/>
           <p:nvPr/>
         </p:nvSpPr>
@@ -12549,84 +12479,14 @@
                 </a:solidFill>
                 <a:latin typeface="Calibri"/>
               </a:rPr>
-              <a:t>1.000</a:t>
-            </a:r>
-          </a:p>
-        </p:txBody>
-      </p:sp>
-      <p:sp>
-        <p:nvSpPr>
-          <p:cNvPr id="24" name="TextBox 23"/>
-          <p:cNvSpPr txBox="1"/>
-          <p:nvPr/>
-        </p:nvSpPr>
-        <p:spPr>
-          <a:xfrm>
-            <a:off x="4709159" y="4343400"/>
-            <a:ext cx="3200399" cy="274320"/>
-          </a:xfrm>
-          <a:prstGeom prst="rect">
-            <a:avLst/>
-          </a:prstGeom>
-          <a:noFill/>
-        </p:spPr>
-        <p:txBody>
-          <a:bodyPr wrap="square" tIns="50800" bIns="50800">
-            <a:spAutoFit/>
-          </a:bodyPr>
-          <a:lstStyle/>
-          <a:p>
-            <a:pPr algn="l"/>
-            <a:r>
-              <a:rPr sz="1200" b="0" i="0">
-                <a:solidFill>
-                  <a:srgbClr val="1F1F1F"/>
-                </a:solidFill>
-                <a:latin typeface="Calibri"/>
-              </a:rPr>
-              <a:t>Hallucinations</a:t>
-            </a:r>
-          </a:p>
-        </p:txBody>
-      </p:sp>
-      <p:sp>
-        <p:nvSpPr>
-          <p:cNvPr id="25" name="TextBox 24"/>
-          <p:cNvSpPr txBox="1"/>
-          <p:nvPr/>
-        </p:nvSpPr>
-        <p:spPr>
-          <a:xfrm>
-            <a:off x="4709159" y="4389120"/>
-            <a:ext cx="3200399" cy="365760"/>
-          </a:xfrm>
-          <a:prstGeom prst="rect">
-            <a:avLst/>
-          </a:prstGeom>
-          <a:noFill/>
-        </p:spPr>
-        <p:txBody>
-          <a:bodyPr wrap="square" tIns="50800" bIns="50800">
-            <a:spAutoFit/>
-          </a:bodyPr>
-          <a:lstStyle/>
-          <a:p>
-            <a:pPr algn="r"/>
-            <a:r>
-              <a:rPr sz="2000" b="1" i="0">
-                <a:solidFill>
-                  <a:srgbClr val="EF6C00"/>
-                </a:solidFill>
-                <a:latin typeface="Calibri"/>
-              </a:rPr>
-              <a:t>0 / 50</a:t>
-            </a:r>
-          </a:p>
-        </p:txBody>
-      </p:sp>
-      <p:sp>
-        <p:nvSpPr>
-          <p:cNvPr id="26" name="Rounded Rectangle 25"/>
+              <a:t>13%</a:t>
+            </a:r>
+          </a:p>
+        </p:txBody>
+      </p:sp>
+      <p:sp>
+        <p:nvSpPr>
+          <p:cNvPr id="22" name="Rounded Rectangle 21"/>
           <p:cNvSpPr/>
           <p:nvPr/>
         </p:nvSpPr>
@@ -12672,7 +12532,7 @@
       </p:sp>
       <p:sp>
         <p:nvSpPr>
-          <p:cNvPr id="27" name="TextBox 26"/>
+          <p:cNvPr id="23" name="TextBox 22"/>
           <p:cNvSpPr txBox="1"/>
           <p:nvPr/>
         </p:nvSpPr>
@@ -12707,7 +12567,7 @@
       </p:sp>
       <p:sp>
         <p:nvSpPr>
-          <p:cNvPr id="28" name="TextBox 27"/>
+          <p:cNvPr id="24" name="TextBox 23"/>
           <p:cNvSpPr txBox="1"/>
           <p:nvPr/>
         </p:nvSpPr>
@@ -12742,7 +12602,7 @@
       </p:sp>
       <p:sp>
         <p:nvSpPr>
-          <p:cNvPr id="29" name="Rectangle 28"/>
+          <p:cNvPr id="25" name="Rectangle 24"/>
           <p:cNvSpPr/>
           <p:nvPr/>
         </p:nvSpPr>
@@ -12785,7 +12645,7 @@
       </p:sp>
       <p:sp>
         <p:nvSpPr>
-          <p:cNvPr id="30" name="TextBox 29"/>
+          <p:cNvPr id="26" name="TextBox 25"/>
           <p:cNvSpPr txBox="1"/>
           <p:nvPr/>
         </p:nvSpPr>
@@ -12820,7 +12680,7 @@
       </p:sp>
       <p:sp>
         <p:nvSpPr>
-          <p:cNvPr id="31" name="TextBox 30"/>
+          <p:cNvPr id="27" name="TextBox 26"/>
           <p:cNvSpPr txBox="1"/>
           <p:nvPr/>
         </p:nvSpPr>
@@ -12855,7 +12715,7 @@
       </p:sp>
       <p:sp>
         <p:nvSpPr>
-          <p:cNvPr id="32" name="TextBox 31"/>
+          <p:cNvPr id="28" name="TextBox 27"/>
           <p:cNvSpPr txBox="1"/>
           <p:nvPr/>
         </p:nvSpPr>
@@ -12883,14 +12743,14 @@
                 </a:solidFill>
                 <a:latin typeface="Calibri"/>
               </a:rPr>
-              <a:t>Faithfulness</a:t>
-            </a:r>
-          </a:p>
-        </p:txBody>
-      </p:sp>
-      <p:sp>
-        <p:nvSpPr>
-          <p:cNvPr id="33" name="TextBox 32"/>
+              <a:t>of gold keywords</a:t>
+            </a:r>
+          </a:p>
+        </p:txBody>
+      </p:sp>
+      <p:sp>
+        <p:nvSpPr>
+          <p:cNvPr id="29" name="TextBox 28"/>
           <p:cNvSpPr txBox="1"/>
           <p:nvPr/>
         </p:nvSpPr>
@@ -12918,84 +12778,14 @@
                 </a:solidFill>
                 <a:latin typeface="Calibri"/>
               </a:rPr>
-              <a:t>1.000</a:t>
-            </a:r>
-          </a:p>
-        </p:txBody>
-      </p:sp>
-      <p:sp>
-        <p:nvSpPr>
-          <p:cNvPr id="34" name="TextBox 33"/>
-          <p:cNvSpPr txBox="1"/>
-          <p:nvPr/>
-        </p:nvSpPr>
-        <p:spPr>
-          <a:xfrm>
-            <a:off x="8686798" y="4343400"/>
-            <a:ext cx="3200399" cy="274320"/>
-          </a:xfrm>
-          <a:prstGeom prst="rect">
-            <a:avLst/>
-          </a:prstGeom>
-          <a:noFill/>
-        </p:spPr>
-        <p:txBody>
-          <a:bodyPr wrap="square" tIns="50800" bIns="50800">
-            <a:spAutoFit/>
-          </a:bodyPr>
-          <a:lstStyle/>
-          <a:p>
-            <a:pPr algn="l"/>
-            <a:r>
-              <a:rPr sz="1200" b="0" i="0">
-                <a:solidFill>
-                  <a:srgbClr val="1F1F1F"/>
-                </a:solidFill>
-                <a:latin typeface="Calibri"/>
-              </a:rPr>
-              <a:t>Hallucinations</a:t>
-            </a:r>
-          </a:p>
-        </p:txBody>
-      </p:sp>
-      <p:sp>
-        <p:nvSpPr>
-          <p:cNvPr id="35" name="TextBox 34"/>
-          <p:cNvSpPr txBox="1"/>
-          <p:nvPr/>
-        </p:nvSpPr>
-        <p:spPr>
-          <a:xfrm>
-            <a:off x="8686798" y="4389120"/>
-            <a:ext cx="3200399" cy="365760"/>
-          </a:xfrm>
-          <a:prstGeom prst="rect">
-            <a:avLst/>
-          </a:prstGeom>
-          <a:noFill/>
-        </p:spPr>
-        <p:txBody>
-          <a:bodyPr wrap="square" tIns="50800" bIns="50800">
-            <a:spAutoFit/>
-          </a:bodyPr>
-          <a:lstStyle/>
-          <a:p>
-            <a:pPr algn="r"/>
-            <a:r>
-              <a:rPr sz="2000" b="1" i="0">
-                <a:solidFill>
-                  <a:srgbClr val="2E7D32"/>
-                </a:solidFill>
-                <a:latin typeface="Calibri"/>
-              </a:rPr>
-              <a:t>0 / 50</a:t>
-            </a:r>
-          </a:p>
-        </p:txBody>
-      </p:sp>
-      <p:sp>
-        <p:nvSpPr>
-          <p:cNvPr id="36" name="TextBox 35"/>
+              <a:t>84%</a:t>
+            </a:r>
+          </a:p>
+        </p:txBody>
+      </p:sp>
+      <p:sp>
+        <p:nvSpPr>
+          <p:cNvPr id="30" name="TextBox 29"/>
           <p:cNvSpPr txBox="1"/>
           <p:nvPr/>
         </p:nvSpPr>
@@ -13023,14 +12813,14 @@
                 </a:solidFill>
                 <a:latin typeface="Calibri"/>
               </a:rPr>
-              <a:t>RAG achieves 100% Keyword Hit Rate and ZERO hallucinations — while No-RAG hallucinated a fabricated R&amp;D percentage.</a:t>
-            </a:r>
-          </a:p>
-        </p:txBody>
-      </p:sp>
-      <p:sp>
-        <p:nvSpPr>
-          <p:cNvPr id="37" name="TextBox 36"/>
+              <a:t>RAG recovers 84% of gold-answer keywords versus under 1% without grounding — relevant retrieved context is what makes answers accurate.</a:t>
+            </a:r>
+          </a:p>
+        </p:txBody>
+      </p:sp>
+      <p:sp>
+        <p:nvSpPr>
+          <p:cNvPr id="31" name="TextBox 30"/>
           <p:cNvSpPr txBox="1"/>
           <p:nvPr/>
         </p:nvSpPr>
@@ -13065,7 +12855,7 @@
       </p:sp>
       <p:sp>
         <p:nvSpPr>
-          <p:cNvPr id="38" name="TextBox 37"/>
+          <p:cNvPr id="32" name="TextBox 31"/>
           <p:cNvSpPr txBox="1"/>
           <p:nvPr/>
         </p:nvSpPr>
